--- a/decks/hist-somme/hist-somme_ch5_somme.pptx
+++ b/decks/hist-somme/hist-somme_ch5_somme.pptx
@@ -128,31 +128,31 @@
   <p:extLst>
     <p:ext uri="{521415D9-36F7-43E2-AB2F-B90AF26B5E84}">
       <p14:sectionLst xmlns:p14="http://schemas.microsoft.com/office/powerpoint/2010/main">
-        <p14:section name="Opening" id="{0fd1a350-6f48-2195-67c0-4a1366443316}">
+        <p14:section name="Opening" id="{4f324430-a41a-c0d9-eacf-a03d5336f55d}">
           <p14:sldIdLst>
             <p14:sldId id="256"/>
           </p14:sldIdLst>
         </p14:section>
-        <p14:section name="Gate" id="{68bd95b6-da9e-d165-03fa-f6fd0616bce8}">
+        <p14:section name="Gate" id="{c1a0fe16-94a7-9c64-d192-30660697efbf}">
           <p14:sldIdLst>
             <p14:sldId id="257"/>
             <p14:sldId id="258"/>
             <p14:sldId id="259"/>
           </p14:sldIdLst>
         </p14:section>
-        <p14:section name="Pre-teach" id="{ce29ae16-28fa-c2fa-23b7-4e1d87af708c}">
+        <p14:section name="Pre-teach" id="{c429c8b0-6374-954e-73bb-f16fe0e01807}">
           <p14:sldIdLst>
             <p14:sldId id="260"/>
             <p14:sldId id="261"/>
           </p14:sldIdLst>
         </p14:section>
-        <p14:section name="Read-along" id="{c9923869-9cb6-6215-bb00-deef781e6848}">
+        <p14:section name="Read-along" id="{176ed1aa-31ff-197f-031c-d04b09af6b6a}">
           <p14:sldIdLst>
             <p14:sldId id="262"/>
             <p14:sldId id="263"/>
           </p14:sldIdLst>
         </p14:section>
-        <p14:section name="Teach" id="{171236bf-6491-03cd-7af3-85552a7fbf67}">
+        <p14:section name="Teach" id="{9cd343b5-edd3-77a0-4016-6f99db29fe11}">
           <p14:sldIdLst>
             <p14:sldId id="264"/>
             <p14:sldId id="265"/>
@@ -162,7 +162,7 @@
             <p14:sldId id="269"/>
           </p14:sldIdLst>
         </p14:section>
-        <p14:section name="Routes" id="{1a258703-3bc5-0245-0da5-654087af0bee}">
+        <p14:section name="Routes" id="{398a2035-60e5-b4e5-4926-2afb506ec0d9}">
           <p14:sldIdLst>
             <p14:sldId id="270"/>
             <p14:sldId id="271"/>
@@ -170,12 +170,12 @@
             <p14:sldId id="273"/>
           </p14:sldIdLst>
         </p14:section>
-        <p14:section name="Close" id="{55afdb4b-e099-8c22-e6d5-32c026b3d943}">
+        <p14:section name="Close" id="{ae5db255-0197-1ea1-a468-34826d27d9a0}">
           <p14:sldIdLst>
             <p14:sldId id="274"/>
           </p14:sldIdLst>
         </p14:section>
-        <p14:section name="Answers" id="{2c8327f2-f10a-ecd9-b986-4af58099863b}">
+        <p14:section name="Answers" id="{2a80405f-cc31-c3c7-740d-9f9c05d661f7}">
           <p14:sldIdLst>
             <p14:sldId id="275"/>
             <p14:sldId id="276"/>
